--- a/entregas/posts/site/kit/editavel/efeito-rebote-qua-14-10.pptx
+++ b/entregas/posts/site/kit/editavel/efeito-rebote-qua-14-10.pptx
@@ -4143,7 +4143,7 @@
         </p:nvSpPr>
         <p:spPr>
           <a:xfrm>
-            <a:off x="915442" y="4521193"/>
+            <a:off x="915442" y="4460294"/>
             <a:ext cx="4783381" cy="304495"/>
           </a:xfrm>
           <a:prstGeom prst="rect">
@@ -4169,13 +4169,13 @@
               </a:spcAft>
             </a:pPr>
             <a:r>
-              <a:rPr b="0" i="0" sz="2397" lang="pt-BR">
+              <a:rPr b="1" i="0" sz="2397" lang="pt-BR">
                 <a:solidFill>
                   <a:srgbClr val="E9C46A"/>
                 </a:solidFill>
-                <a:latin typeface="Barlow SemiBold"/>
-                <a:ea typeface="Barlow SemiBold"/>
-                <a:cs typeface="Barlow SemiBold"/>
+                <a:latin typeface="Barlow"/>
+                <a:ea typeface="Barlow"/>
+                <a:cs typeface="Barlow"/>
               </a:rPr>
               <a:t>Série Entenda o projeto · parte 2</a:t>
             </a:r>
@@ -4190,7 +4190,7 @@
         </p:nvSpPr>
         <p:spPr>
           <a:xfrm>
-            <a:off x="915442" y="5276639"/>
+            <a:off x="915442" y="5000538"/>
             <a:ext cx="7034897" cy="2459831"/>
           </a:xfrm>
           <a:prstGeom prst="rect">
@@ -4249,7 +4249,7 @@
         </p:nvSpPr>
         <p:spPr>
           <a:xfrm>
-            <a:off x="915442" y="7920166"/>
+            <a:off x="915442" y="7960182"/>
             <a:ext cx="5404030" cy="1560641"/>
           </a:xfrm>
           <a:prstGeom prst="rect">
@@ -4296,7 +4296,7 @@
         </p:nvSpPr>
         <p:spPr>
           <a:xfrm>
-            <a:off x="915442" y="11515339"/>
+            <a:off x="915442" y="11496308"/>
             <a:ext cx="1210717" cy="437712"/>
           </a:xfrm>
           <a:prstGeom prst="rect">
@@ -4626,7 +4626,7 @@
         </p:nvSpPr>
         <p:spPr>
           <a:xfrm>
-            <a:off x="915442" y="1079840"/>
+            <a:off x="915442" y="1018941"/>
             <a:ext cx="2048917" cy="304495"/>
           </a:xfrm>
           <a:prstGeom prst="rect">
@@ -4652,13 +4652,13 @@
               </a:spcAft>
             </a:pPr>
             <a:r>
-              <a:rPr b="0" i="0" sz="2397" lang="pt-BR">
+              <a:rPr b="1" i="0" sz="2397" lang="pt-BR">
                 <a:solidFill>
                   <a:srgbClr val="B5121B"/>
                 </a:solidFill>
-                <a:latin typeface="Barlow SemiBold"/>
-                <a:ea typeface="Barlow SemiBold"/>
-                <a:cs typeface="Barlow SemiBold"/>
+                <a:latin typeface="Barlow"/>
+                <a:ea typeface="Barlow"/>
+                <a:cs typeface="Barlow"/>
               </a:rPr>
               <a:t>O que diz a lei</a:t>
             </a:r>
@@ -4673,7 +4673,7 @@
         </p:nvSpPr>
         <p:spPr>
           <a:xfrm>
-            <a:off x="915442" y="4192460"/>
+            <a:off x="915442" y="3982893"/>
             <a:ext cx="6965156" cy="1867049"/>
           </a:xfrm>
           <a:prstGeom prst="rect">
@@ -4732,7 +4732,7 @@
         </p:nvSpPr>
         <p:spPr>
           <a:xfrm>
-            <a:off x="1353145" y="6689342"/>
+            <a:off x="1353145" y="6761372"/>
             <a:ext cx="7743682" cy="1656681"/>
           </a:xfrm>
           <a:prstGeom prst="rect">
@@ -4823,7 +4823,7 @@
         </p:nvSpPr>
         <p:spPr>
           <a:xfrm>
-            <a:off x="915442" y="11515488"/>
+            <a:off x="915442" y="11496457"/>
             <a:ext cx="4331866" cy="437712"/>
           </a:xfrm>
           <a:prstGeom prst="rect">
@@ -5096,7 +5096,7 @@
         </p:nvSpPr>
         <p:spPr>
           <a:xfrm>
-            <a:off x="915442" y="1079840"/>
+            <a:off x="915442" y="1018941"/>
             <a:ext cx="2499777" cy="304495"/>
           </a:xfrm>
           <a:prstGeom prst="rect">
@@ -5122,13 +5122,13 @@
               </a:spcAft>
             </a:pPr>
             <a:r>
-              <a:rPr b="0" i="0" sz="2397" lang="pt-BR">
+              <a:rPr b="1" i="0" sz="2397" lang="pt-BR">
                 <a:solidFill>
                   <a:srgbClr val="B5121B"/>
                 </a:solidFill>
-                <a:latin typeface="Barlow SemiBold"/>
-                <a:ea typeface="Barlow SemiBold"/>
-                <a:cs typeface="Barlow SemiBold"/>
+                <a:latin typeface="Barlow"/>
+                <a:ea typeface="Barlow"/>
+                <a:cs typeface="Barlow"/>
               </a:rPr>
               <a:t>Aqui em Maringá</a:t>
             </a:r>
@@ -5143,7 +5143,7 @@
         </p:nvSpPr>
         <p:spPr>
           <a:xfrm>
-            <a:off x="915442" y="3719387"/>
+            <a:off x="915442" y="2718462"/>
             <a:ext cx="4845263" cy="2430818"/>
           </a:xfrm>
           <a:prstGeom prst="rect">
@@ -5190,7 +5190,7 @@
         </p:nvSpPr>
         <p:spPr>
           <a:xfrm>
-            <a:off x="915442" y="6108338"/>
+            <a:off x="915442" y="5949013"/>
             <a:ext cx="6783110" cy="1419442"/>
           </a:xfrm>
           <a:prstGeom prst="rect">
@@ -5249,7 +5249,7 @@
         </p:nvSpPr>
         <p:spPr>
           <a:xfrm>
-            <a:off x="915442" y="7790223"/>
+            <a:off x="915442" y="7862253"/>
             <a:ext cx="8586347" cy="1104454"/>
           </a:xfrm>
           <a:prstGeom prst="rect">
@@ -5296,7 +5296,7 @@
         </p:nvSpPr>
         <p:spPr>
           <a:xfrm>
-            <a:off x="915442" y="9292507"/>
+            <a:off x="915442" y="9329540"/>
             <a:ext cx="5921826" cy="333299"/>
           </a:xfrm>
           <a:prstGeom prst="rect">
@@ -5343,7 +5343,7 @@
         </p:nvSpPr>
         <p:spPr>
           <a:xfrm>
-            <a:off x="915442" y="11515339"/>
+            <a:off x="915442" y="11496308"/>
             <a:ext cx="6141527" cy="437712"/>
           </a:xfrm>
           <a:prstGeom prst="rect">
@@ -5616,7 +5616,7 @@
         </p:nvSpPr>
         <p:spPr>
           <a:xfrm>
-            <a:off x="915442" y="1079840"/>
+            <a:off x="915442" y="1018941"/>
             <a:ext cx="997565" cy="304495"/>
           </a:xfrm>
           <a:prstGeom prst="rect">
@@ -5642,13 +5642,13 @@
               </a:spcAft>
             </a:pPr>
             <a:r>
-              <a:rPr b="0" i="0" sz="2397" lang="pt-BR">
+              <a:rPr b="1" i="0" sz="2397" lang="pt-BR">
                 <a:solidFill>
                   <a:srgbClr val="B5121B"/>
                 </a:solidFill>
-                <a:latin typeface="Barlow SemiBold"/>
-                <a:ea typeface="Barlow SemiBold"/>
-                <a:cs typeface="Barlow SemiBold"/>
+                <a:latin typeface="Barlow"/>
+                <a:ea typeface="Barlow"/>
+                <a:cs typeface="Barlow"/>
               </a:rPr>
               <a:t>Saúde</a:t>
             </a:r>
@@ -5663,7 +5663,7 @@
         </p:nvSpPr>
         <p:spPr>
           <a:xfrm>
-            <a:off x="915442" y="4315987"/>
+            <a:off x="915442" y="4106420"/>
             <a:ext cx="5414486" cy="1867049"/>
           </a:xfrm>
           <a:prstGeom prst="rect">
@@ -5722,7 +5722,7 @@
         </p:nvSpPr>
         <p:spPr>
           <a:xfrm>
-            <a:off x="915442" y="6413266"/>
+            <a:off x="915442" y="6485296"/>
             <a:ext cx="8367346" cy="2208908"/>
           </a:xfrm>
           <a:prstGeom prst="rect">
@@ -5769,7 +5769,7 @@
         </p:nvSpPr>
         <p:spPr>
           <a:xfrm>
-            <a:off x="915442" y="11515488"/>
+            <a:off x="915442" y="11496457"/>
             <a:ext cx="2988945" cy="437712"/>
           </a:xfrm>
           <a:prstGeom prst="rect">
@@ -6075,7 +6075,7 @@
         </p:nvSpPr>
         <p:spPr>
           <a:xfrm>
-            <a:off x="915442" y="1079840"/>
+            <a:off x="915442" y="1018941"/>
             <a:ext cx="1728534" cy="304495"/>
           </a:xfrm>
           <a:prstGeom prst="rect">
@@ -6101,13 +6101,13 @@
               </a:spcAft>
             </a:pPr>
             <a:r>
-              <a:rPr b="0" i="0" sz="2397" lang="pt-BR">
+              <a:rPr b="1" i="0" sz="2397" lang="pt-BR">
                 <a:solidFill>
                   <a:srgbClr val="B5121B"/>
                 </a:solidFill>
-                <a:latin typeface="Barlow SemiBold"/>
-                <a:ea typeface="Barlow SemiBold"/>
-                <a:cs typeface="Barlow SemiBold"/>
+                <a:latin typeface="Barlow"/>
+                <a:ea typeface="Barlow"/>
+                <a:cs typeface="Barlow"/>
               </a:rPr>
               <a:t>Em resumo</a:t>
             </a:r>
@@ -6122,7 +6122,7 @@
         </p:nvSpPr>
         <p:spPr>
           <a:xfrm>
-            <a:off x="915442" y="4192460"/>
+            <a:off x="915442" y="3982893"/>
             <a:ext cx="6303109" cy="1867049"/>
           </a:xfrm>
           <a:prstGeom prst="rect">
@@ -6181,7 +6181,7 @@
         </p:nvSpPr>
         <p:spPr>
           <a:xfrm>
-            <a:off x="1353145" y="6689342"/>
+            <a:off x="1353145" y="6761372"/>
             <a:ext cx="7548122" cy="1656681"/>
           </a:xfrm>
           <a:prstGeom prst="rect">
@@ -6250,7 +6250,7 @@
         </p:nvSpPr>
         <p:spPr>
           <a:xfrm>
-            <a:off x="915442" y="11515488"/>
+            <a:off x="915442" y="11496457"/>
             <a:ext cx="1849517" cy="437712"/>
           </a:xfrm>
           <a:prstGeom prst="rect">
@@ -6378,7 +6378,7 @@
         </p:nvSpPr>
         <p:spPr>
           <a:xfrm>
-            <a:off x="3868571" y="5430830"/>
+            <a:off x="3868571" y="5369931"/>
             <a:ext cx="2549709" cy="304495"/>
           </a:xfrm>
           <a:prstGeom prst="rect">
@@ -6404,13 +6404,13 @@
               </a:spcAft>
             </a:pPr>
             <a:r>
-              <a:rPr b="0" i="0" sz="2397" lang="pt-BR">
+              <a:rPr b="1" i="0" sz="2397" lang="pt-BR">
                 <a:solidFill>
                   <a:srgbClr val="E9C46A"/>
                 </a:solidFill>
-                <a:latin typeface="Barlow SemiBold"/>
-                <a:ea typeface="Barlow SemiBold"/>
-                <a:cs typeface="Barlow SemiBold"/>
+                <a:latin typeface="Barlow"/>
+                <a:ea typeface="Barlow"/>
+                <a:cs typeface="Barlow"/>
               </a:rPr>
               <a:t>Na sexta, parte 3</a:t>
             </a:r>
@@ -6425,7 +6425,7 @@
         </p:nvSpPr>
         <p:spPr>
           <a:xfrm>
-            <a:off x="526085" y="6199556"/>
+            <a:off x="526085" y="5989989"/>
             <a:ext cx="9234681" cy="1867049"/>
           </a:xfrm>
           <a:prstGeom prst="rect">
@@ -6484,7 +6484,7 @@
         </p:nvSpPr>
         <p:spPr>
           <a:xfrm>
-            <a:off x="2531872" y="8670860"/>
+            <a:off x="2531872" y="8572105"/>
             <a:ext cx="5223108" cy="493776"/>
           </a:xfrm>
           <a:prstGeom prst="rect">
